--- a/dokumentáció/Első projekt.pptx
+++ b/dokumentáció/Első projekt.pptx
@@ -7,11 +7,10 @@
   <p:sldIdLst>
     <p:sldId id="256" r:id="rId2"/>
     <p:sldId id="257" r:id="rId3"/>
-    <p:sldId id="258" r:id="rId4"/>
-    <p:sldId id="259" r:id="rId5"/>
-    <p:sldId id="262" r:id="rId6"/>
-    <p:sldId id="261" r:id="rId7"/>
-    <p:sldId id="260" r:id="rId8"/>
+    <p:sldId id="259" r:id="rId4"/>
+    <p:sldId id="262" r:id="rId5"/>
+    <p:sldId id="261" r:id="rId6"/>
+    <p:sldId id="260" r:id="rId7"/>
   </p:sldIdLst>
   <p:sldSz cx="12192000" cy="6858000"/>
   <p:notesSz cx="6858000" cy="9144000"/>
@@ -110,6 +109,11 @@
       </a:defRPr>
     </a:lvl9pPr>
   </p:defaultTextStyle>
+  <p:extLst>
+    <p:ext uri="{EFAFB233-063F-42B5-8137-9DF3F51BA10A}">
+      <p15:sldGuideLst xmlns:p15="http://schemas.microsoft.com/office/powerpoint/2012/main"/>
+    </p:ext>
+  </p:extLst>
 </p:presentation>
 </file>
 
@@ -3983,7 +3987,7 @@
         <p:spPr>
           <a:xfrm>
             <a:off x="8801100" y="1922463"/>
-            <a:ext cx="2514600" cy="3046988"/>
+            <a:ext cx="2514600" cy="3847207"/>
           </a:xfrm>
           <a:prstGeom prst="rect">
             <a:avLst/>
@@ -3997,26 +4001,46 @@
           <a:lstStyle/>
           <a:p>
             <a:r>
-              <a:rPr lang="hu-HU" sz="2400" dirty="0"/>
+              <a:rPr lang="hu-HU" sz="2200" dirty="0"/>
               <a:t>-ISO fájl kiválasztása</a:t>
             </a:r>
           </a:p>
           <a:p>
             <a:r>
-              <a:rPr lang="hu-HU" sz="2400" dirty="0"/>
+              <a:rPr lang="hu-HU" sz="2200" dirty="0"/>
               <a:t>-RAM és CPU megadása(4GB RAM, 3CPU)</a:t>
             </a:r>
           </a:p>
           <a:p>
             <a:r>
-              <a:rPr lang="hu-HU" sz="2400" dirty="0"/>
+              <a:rPr lang="hu-HU" sz="2200" dirty="0"/>
               <a:t>-Tároló mérete</a:t>
             </a:r>
           </a:p>
           <a:p>
             <a:r>
-              <a:rPr lang="hu-HU" sz="2400" dirty="0"/>
+              <a:rPr lang="hu-HU" sz="2200" dirty="0"/>
               <a:t>(50GB)</a:t>
+            </a:r>
+          </a:p>
+          <a:p>
+            <a:r>
+              <a:rPr lang="hu-HU" sz="2200" dirty="0"/>
+              <a:t>-Boot sorrend beállítása</a:t>
+            </a:r>
+          </a:p>
+          <a:p>
+            <a:r>
+              <a:rPr lang="hu-HU" sz="2200" dirty="0"/>
+              <a:t>-Tárolót SSD-</a:t>
+            </a:r>
+            <a:r>
+              <a:rPr lang="hu-HU" sz="2200" dirty="0" err="1"/>
+              <a:t>nek</a:t>
+            </a:r>
+            <a:r>
+              <a:rPr lang="hu-HU" sz="2200" dirty="0"/>
+              <a:t> állítjuk </a:t>
             </a:r>
           </a:p>
           <a:p>
@@ -4059,7 +4083,7 @@
           <p:cNvPr id="2" name="Cím 1">
             <a:extLst>
               <a:ext uri="{FF2B5EF4-FFF2-40B4-BE49-F238E27FC236}">
-                <a16:creationId xmlns:a16="http://schemas.microsoft.com/office/drawing/2014/main" id="{114656D9-E17A-4585-9302-7213EBBA33C3}"/>
+                <a16:creationId xmlns:a16="http://schemas.microsoft.com/office/drawing/2014/main" id="{E32A5965-4DB0-4D4B-9323-C394BAA11386}"/>
               </a:ext>
             </a:extLst>
           </p:cNvPr>
@@ -4077,7 +4101,7 @@
           <a:p>
             <a:r>
               <a:rPr lang="hu-HU" dirty="0"/>
-              <a:t>A VM konfigurálása</a:t>
+              <a:t>Windows telepítése</a:t>
             </a:r>
           </a:p>
         </p:txBody>
@@ -4087,7 +4111,7 @@
           <p:cNvPr id="4" name="Tartalom helye 3">
             <a:extLst>
               <a:ext uri="{FF2B5EF4-FFF2-40B4-BE49-F238E27FC236}">
-                <a16:creationId xmlns:a16="http://schemas.microsoft.com/office/drawing/2014/main" id="{FBC97D5C-9FCE-484A-94C7-A5E732FCDC87}"/>
+                <a16:creationId xmlns:a16="http://schemas.microsoft.com/office/drawing/2014/main" id="{7A3AAB3D-875C-4AFB-B328-C51B496C90E5}"/>
               </a:ext>
             </a:extLst>
           </p:cNvPr>
@@ -4106,8 +4130,8 @@
         </p:blipFill>
         <p:spPr>
           <a:xfrm>
-            <a:off x="1097280" y="1979613"/>
-            <a:ext cx="6867246" cy="4022725"/>
+            <a:off x="1097281" y="2036763"/>
+            <a:ext cx="5303520" cy="4022725"/>
           </a:xfrm>
           <a:prstGeom prst="rect">
             <a:avLst/>
@@ -4119,7 +4143,7 @@
           <p:cNvPr id="5" name="Szövegdoboz 4">
             <a:extLst>
               <a:ext uri="{FF2B5EF4-FFF2-40B4-BE49-F238E27FC236}">
-                <a16:creationId xmlns:a16="http://schemas.microsoft.com/office/drawing/2014/main" id="{661DD320-D29E-46A5-B3E4-7FFE9CE4E9A4}"/>
+                <a16:creationId xmlns:a16="http://schemas.microsoft.com/office/drawing/2014/main" id="{05603EC0-D020-4C68-AA08-BBC97C322308}"/>
               </a:ext>
             </a:extLst>
           </p:cNvPr>
@@ -4128,8 +4152,8 @@
         </p:nvSpPr>
         <p:spPr>
           <a:xfrm>
-            <a:off x="8343900" y="1979613"/>
-            <a:ext cx="2811780" cy="1569660"/>
+            <a:off x="6816089" y="2105542"/>
+            <a:ext cx="4278630" cy="3170099"/>
           </a:xfrm>
           <a:prstGeom prst="rect">
             <a:avLst/>
@@ -4143,30 +4167,49 @@
           <a:lstStyle/>
           <a:p>
             <a:r>
-              <a:rPr lang="hu-HU" sz="2400" dirty="0"/>
-              <a:t>-Boot sorrend beállítása</a:t>
-            </a:r>
-          </a:p>
-          <a:p>
-            <a:r>
-              <a:rPr lang="hu-HU" sz="2400" dirty="0"/>
-              <a:t>-Tárolót SSD-</a:t>
-            </a:r>
-            <a:r>
-              <a:rPr lang="hu-HU" sz="2400" dirty="0" err="1"/>
-              <a:t>nek</a:t>
-            </a:r>
-            <a:r>
-              <a:rPr lang="hu-HU" sz="2400" dirty="0"/>
-              <a:t> állítjuk </a:t>
-            </a:r>
+              <a:rPr lang="hu-HU" sz="2200" dirty="0"/>
+              <a:t>-Nyelv megadása</a:t>
+            </a:r>
+          </a:p>
+          <a:p>
+            <a:r>
+              <a:rPr lang="hu-HU" sz="2200" dirty="0"/>
+              <a:t>-Nincs termékkulcs</a:t>
+            </a:r>
+          </a:p>
+          <a:p>
+            <a:r>
+              <a:rPr lang="hu-HU" sz="2200" dirty="0"/>
+              <a:t>-Operációs rendszer kiválasztása(Datacenter asztali felülettel)</a:t>
+            </a:r>
+          </a:p>
+          <a:p>
+            <a:r>
+              <a:rPr lang="hu-HU" sz="2200" dirty="0"/>
+              <a:t>-Egyéni telepítés</a:t>
+            </a:r>
+          </a:p>
+          <a:p>
+            <a:r>
+              <a:rPr lang="hu-HU" sz="2200" dirty="0"/>
+              <a:t>-Meghajtó megadása</a:t>
+            </a:r>
+          </a:p>
+          <a:p>
+            <a:r>
+              <a:rPr lang="hu-HU" sz="2200" dirty="0"/>
+              <a:t>-Jelszó megadása (P@ssw0rd)</a:t>
+            </a:r>
+          </a:p>
+          <a:p>
+            <a:endParaRPr lang="hu-HU" sz="2400" dirty="0"/>
           </a:p>
         </p:txBody>
       </p:sp>
     </p:spTree>
     <p:extLst>
       <p:ext uri="{BB962C8B-B14F-4D97-AF65-F5344CB8AC3E}">
-        <p14:creationId xmlns:p14="http://schemas.microsoft.com/office/powerpoint/2010/main" val="1631579760"/>
+        <p14:creationId xmlns:p14="http://schemas.microsoft.com/office/powerpoint/2010/main" val="1802749799"/>
       </p:ext>
     </p:extLst>
   </p:cSld>
@@ -4198,7 +4241,7 @@
           <p:cNvPr id="2" name="Cím 1">
             <a:extLst>
               <a:ext uri="{FF2B5EF4-FFF2-40B4-BE49-F238E27FC236}">
-                <a16:creationId xmlns:a16="http://schemas.microsoft.com/office/drawing/2014/main" id="{E32A5965-4DB0-4D4B-9323-C394BAA11386}"/>
+                <a16:creationId xmlns:a16="http://schemas.microsoft.com/office/drawing/2014/main" id="{FF8459DE-BE4E-4E67-B496-92C3711080B5}"/>
               </a:ext>
             </a:extLst>
           </p:cNvPr>
@@ -4216,7 +4259,7 @@
           <a:p>
             <a:r>
               <a:rPr lang="hu-HU" dirty="0"/>
-              <a:t>Windows telepítése</a:t>
+              <a:t>Hálózat beállítás</a:t>
             </a:r>
           </a:p>
         </p:txBody>
@@ -4226,7 +4269,7 @@
           <p:cNvPr id="4" name="Tartalom helye 3">
             <a:extLst>
               <a:ext uri="{FF2B5EF4-FFF2-40B4-BE49-F238E27FC236}">
-                <a16:creationId xmlns:a16="http://schemas.microsoft.com/office/drawing/2014/main" id="{7A3AAB3D-875C-4AFB-B328-C51B496C90E5}"/>
+                <a16:creationId xmlns:a16="http://schemas.microsoft.com/office/drawing/2014/main" id="{F185B90A-ABCD-45F1-AB4C-1DB5DEC368BC}"/>
               </a:ext>
             </a:extLst>
           </p:cNvPr>
@@ -4245,8 +4288,8 @@
         </p:blipFill>
         <p:spPr>
           <a:xfrm>
-            <a:off x="1097281" y="2036763"/>
-            <a:ext cx="5303520" cy="4022725"/>
+            <a:off x="1200015" y="2064924"/>
+            <a:ext cx="4895985" cy="4022725"/>
           </a:xfrm>
           <a:prstGeom prst="rect">
             <a:avLst/>
@@ -4258,7 +4301,7 @@
           <p:cNvPr id="5" name="Szövegdoboz 4">
             <a:extLst>
               <a:ext uri="{FF2B5EF4-FFF2-40B4-BE49-F238E27FC236}">
-                <a16:creationId xmlns:a16="http://schemas.microsoft.com/office/drawing/2014/main" id="{05603EC0-D020-4C68-AA08-BBC97C322308}"/>
+                <a16:creationId xmlns:a16="http://schemas.microsoft.com/office/drawing/2014/main" id="{A7A3E934-00BE-4B3A-AB43-52689EDAAF33}"/>
               </a:ext>
             </a:extLst>
           </p:cNvPr>
@@ -4267,8 +4310,8 @@
         </p:nvSpPr>
         <p:spPr>
           <a:xfrm>
-            <a:off x="6816089" y="2105542"/>
-            <a:ext cx="4278630" cy="3416320"/>
+            <a:off x="6559825" y="2064924"/>
+            <a:ext cx="4895985" cy="2800767"/>
           </a:xfrm>
           <a:prstGeom prst="rect">
             <a:avLst/>
@@ -4282,49 +4325,130 @@
           <a:lstStyle/>
           <a:p>
             <a:r>
-              <a:rPr lang="hu-HU" sz="2400" dirty="0"/>
-              <a:t>-Nyelv megadása</a:t>
-            </a:r>
-          </a:p>
-          <a:p>
-            <a:r>
-              <a:rPr lang="hu-HU" sz="2400" dirty="0"/>
-              <a:t>-Nincs termékkulcs</a:t>
-            </a:r>
-          </a:p>
-          <a:p>
-            <a:r>
-              <a:rPr lang="hu-HU" sz="2400" dirty="0"/>
-              <a:t>-Operációs rendszer kiválasztása(Datacenter asztali felülettel)</a:t>
-            </a:r>
-          </a:p>
-          <a:p>
-            <a:r>
-              <a:rPr lang="hu-HU" sz="2400" dirty="0"/>
-              <a:t>-Egyéni telepítés</a:t>
-            </a:r>
-          </a:p>
-          <a:p>
-            <a:r>
-              <a:rPr lang="hu-HU" sz="2400" dirty="0"/>
-              <a:t>-Meghajtó megadása</a:t>
-            </a:r>
-          </a:p>
-          <a:p>
-            <a:r>
-              <a:rPr lang="hu-HU" sz="2400" dirty="0"/>
-              <a:t>-Jelszó megadása</a:t>
-            </a:r>
-          </a:p>
-          <a:p>
-            <a:endParaRPr lang="hu-HU" sz="2400" dirty="0"/>
+              <a:rPr lang="hu-HU" sz="2200" b="0" i="0" dirty="0">
+                <a:solidFill>
+                  <a:srgbClr val="000000"/>
+                </a:solidFill>
+                <a:effectLst/>
+                <a:latin typeface="Calibri" panose="020F0502020204030204" pitchFamily="34" charset="0"/>
+              </a:rPr>
+              <a:t>-Fájl -&gt; Eszközök -&gt;Network Manager-&gt;</a:t>
+            </a:r>
+            <a:r>
+              <a:rPr lang="hu-HU" sz="2200" b="0" i="0" dirty="0" err="1">
+                <a:solidFill>
+                  <a:srgbClr val="000000"/>
+                </a:solidFill>
+                <a:effectLst/>
+                <a:latin typeface="Calibri" panose="020F0502020204030204" pitchFamily="34" charset="0"/>
+              </a:rPr>
+              <a:t>léterehozás</a:t>
+            </a:r>
+            <a:endParaRPr lang="hu-HU" sz="2200" b="0" i="0" dirty="0">
+              <a:solidFill>
+                <a:srgbClr val="000000"/>
+              </a:solidFill>
+              <a:effectLst/>
+              <a:latin typeface="Calibri" panose="020F0502020204030204" pitchFamily="34" charset="0"/>
+            </a:endParaRPr>
+          </a:p>
+          <a:p>
+            <a:r>
+              <a:rPr lang="hu-HU" sz="2200" dirty="0">
+                <a:solidFill>
+                  <a:srgbClr val="000000"/>
+                </a:solidFill>
+                <a:latin typeface="Calibri" panose="020F0502020204030204" pitchFamily="34" charset="0"/>
+              </a:rPr>
+              <a:t>-Konfigurálás-&gt;hálózat-&gt;NAT hálózat</a:t>
+            </a:r>
+          </a:p>
+          <a:p>
+            <a:r>
+              <a:rPr lang="hu-HU" sz="2200" b="0" i="0" dirty="0">
+                <a:solidFill>
+                  <a:srgbClr val="000000"/>
+                </a:solidFill>
+                <a:effectLst/>
+                <a:latin typeface="Calibri" panose="020F0502020204030204" pitchFamily="34" charset="0"/>
+              </a:rPr>
+              <a:t>-Kiszolgáló kezelő-&gt;helyi szerver-&gt;</a:t>
+            </a:r>
+          </a:p>
+          <a:p>
+            <a:r>
+              <a:rPr lang="hu-HU" sz="2200" dirty="0">
+                <a:solidFill>
+                  <a:srgbClr val="000000"/>
+                </a:solidFill>
+                <a:latin typeface="Calibri" panose="020F0502020204030204" pitchFamily="34" charset="0"/>
+              </a:rPr>
+              <a:t>Ethernet-&gt;</a:t>
+            </a:r>
+            <a:r>
+              <a:rPr lang="hu-HU" sz="2200" b="0" i="0" dirty="0">
+                <a:solidFill>
+                  <a:srgbClr val="000000"/>
+                </a:solidFill>
+                <a:effectLst/>
+                <a:latin typeface="Calibri" panose="020F0502020204030204" pitchFamily="34" charset="0"/>
+              </a:rPr>
+              <a:t>jobb klikk-&gt;tulajdonságok-&gt;TCP/IPv4</a:t>
+            </a:r>
+          </a:p>
+          <a:p>
+            <a:r>
+              <a:rPr lang="hu-HU" sz="2200" dirty="0">
+                <a:solidFill>
+                  <a:srgbClr val="000000"/>
+                </a:solidFill>
+                <a:latin typeface="Calibri" panose="020F0502020204030204" pitchFamily="34" charset="0"/>
+              </a:rPr>
+              <a:t>-</a:t>
+            </a:r>
+            <a:r>
+              <a:rPr lang="hu-HU" sz="2200" dirty="0" err="1">
+                <a:solidFill>
+                  <a:srgbClr val="000000"/>
+                </a:solidFill>
+                <a:latin typeface="Calibri" panose="020F0502020204030204" pitchFamily="34" charset="0"/>
+              </a:rPr>
+              <a:t>ip</a:t>
+            </a:r>
+            <a:r>
+              <a:rPr lang="hu-HU" sz="2200" dirty="0">
+                <a:solidFill>
+                  <a:srgbClr val="000000"/>
+                </a:solidFill>
+                <a:latin typeface="Calibri" panose="020F0502020204030204" pitchFamily="34" charset="0"/>
+              </a:rPr>
+              <a:t> cím: 10.0.2.10/24</a:t>
+            </a:r>
+          </a:p>
+          <a:p>
+            <a:r>
+              <a:rPr lang="hu-HU" sz="2200" dirty="0">
+                <a:solidFill>
+                  <a:srgbClr val="000000"/>
+                </a:solidFill>
+                <a:latin typeface="Calibri" panose="020F0502020204030204" pitchFamily="34" charset="0"/>
+              </a:rPr>
+              <a:t>-átjáró. 10.0.2.1</a:t>
+            </a:r>
+            <a:endParaRPr lang="hu-HU" sz="2200" b="0" i="0" dirty="0">
+              <a:solidFill>
+                <a:srgbClr val="000000"/>
+              </a:solidFill>
+              <a:effectLst/>
+              <a:latin typeface="Calibri" panose="020F0502020204030204" pitchFamily="34" charset="0"/>
+            </a:endParaRPr>
           </a:p>
         </p:txBody>
       </p:sp>
     </p:spTree>
     <p:extLst>
       <p:ext uri="{BB962C8B-B14F-4D97-AF65-F5344CB8AC3E}">
-        <p14:creationId xmlns:p14="http://schemas.microsoft.com/office/powerpoint/2010/main" val="1802749799"/>
+        <p14:creationId xmlns:p14="http://schemas.microsoft.com/office/powerpoint/2010/main" val="2032616641"/>
       </p:ext>
     </p:extLst>
   </p:cSld>
@@ -4356,7 +4480,7 @@
           <p:cNvPr id="2" name="Cím 1">
             <a:extLst>
               <a:ext uri="{FF2B5EF4-FFF2-40B4-BE49-F238E27FC236}">
-                <a16:creationId xmlns:a16="http://schemas.microsoft.com/office/drawing/2014/main" id="{FF8459DE-BE4E-4E67-B496-92C3711080B5}"/>
+                <a16:creationId xmlns:a16="http://schemas.microsoft.com/office/drawing/2014/main" id="{A08A5A86-8DF0-445F-BD37-23F5FC8C1641}"/>
               </a:ext>
             </a:extLst>
           </p:cNvPr>
@@ -4374,7 +4498,7 @@
           <a:p>
             <a:r>
               <a:rPr lang="hu-HU" dirty="0"/>
-              <a:t>Hálózat beállítás</a:t>
+              <a:t>Új felhasználók, csoportok létrehozása</a:t>
             </a:r>
           </a:p>
         </p:txBody>
@@ -4384,7 +4508,7 @@
           <p:cNvPr id="4" name="Tartalom helye 3">
             <a:extLst>
               <a:ext uri="{FF2B5EF4-FFF2-40B4-BE49-F238E27FC236}">
-                <a16:creationId xmlns:a16="http://schemas.microsoft.com/office/drawing/2014/main" id="{F185B90A-ABCD-45F1-AB4C-1DB5DEC368BC}"/>
+                <a16:creationId xmlns:a16="http://schemas.microsoft.com/office/drawing/2014/main" id="{AC5C3AAC-01CB-4043-94CA-9F58BF3A298E}"/>
               </a:ext>
             </a:extLst>
           </p:cNvPr>
@@ -4403,8 +4527,8 @@
         </p:blipFill>
         <p:spPr>
           <a:xfrm>
-            <a:off x="1200015" y="2064924"/>
-            <a:ext cx="4895985" cy="4022725"/>
+            <a:off x="1097280" y="1927861"/>
+            <a:ext cx="5132205" cy="4303078"/>
           </a:xfrm>
           <a:prstGeom prst="rect">
             <a:avLst/>
@@ -4416,7 +4540,7 @@
           <p:cNvPr id="5" name="Szövegdoboz 4">
             <a:extLst>
               <a:ext uri="{FF2B5EF4-FFF2-40B4-BE49-F238E27FC236}">
-                <a16:creationId xmlns:a16="http://schemas.microsoft.com/office/drawing/2014/main" id="{A7A3E934-00BE-4B3A-AB43-52689EDAAF33}"/>
+                <a16:creationId xmlns:a16="http://schemas.microsoft.com/office/drawing/2014/main" id="{CD26FB6F-2CE6-4AD5-8386-583D6C0C0B8B}"/>
               </a:ext>
             </a:extLst>
           </p:cNvPr>
@@ -4425,8 +4549,8 @@
         </p:nvSpPr>
         <p:spPr>
           <a:xfrm>
-            <a:off x="6559825" y="2064924"/>
-            <a:ext cx="4895985" cy="3046988"/>
+            <a:off x="6679096" y="1947739"/>
+            <a:ext cx="4476584" cy="2154436"/>
           </a:xfrm>
           <a:prstGeom prst="rect">
             <a:avLst/>
@@ -4440,130 +4564,55 @@
           <a:lstStyle/>
           <a:p>
             <a:r>
-              <a:rPr lang="hu-HU" sz="2400" b="0" i="0" dirty="0">
-                <a:solidFill>
-                  <a:srgbClr val="000000"/>
-                </a:solidFill>
-                <a:effectLst/>
-                <a:latin typeface="Calibri" panose="020F0502020204030204" pitchFamily="34" charset="0"/>
-              </a:rPr>
-              <a:t>-Fájl -&gt; Eszközök -&gt;Network Manager-&gt;</a:t>
-            </a:r>
-            <a:r>
-              <a:rPr lang="hu-HU" sz="2400" b="0" i="0" dirty="0" err="1">
-                <a:solidFill>
-                  <a:srgbClr val="000000"/>
-                </a:solidFill>
-                <a:effectLst/>
-                <a:latin typeface="Calibri" panose="020F0502020204030204" pitchFamily="34" charset="0"/>
-              </a:rPr>
-              <a:t>léterehozás</a:t>
-            </a:r>
-            <a:endParaRPr lang="hu-HU" sz="2400" b="0" i="0" dirty="0">
-              <a:solidFill>
-                <a:srgbClr val="000000"/>
-              </a:solidFill>
-              <a:effectLst/>
-              <a:latin typeface="Calibri" panose="020F0502020204030204" pitchFamily="34" charset="0"/>
-            </a:endParaRPr>
-          </a:p>
-          <a:p>
-            <a:r>
-              <a:rPr lang="hu-HU" sz="2400" dirty="0">
-                <a:solidFill>
-                  <a:srgbClr val="000000"/>
-                </a:solidFill>
-                <a:latin typeface="Calibri" panose="020F0502020204030204" pitchFamily="34" charset="0"/>
-              </a:rPr>
-              <a:t>-Konfigurálás-&gt;hálózat-&gt;NAT hálózat</a:t>
-            </a:r>
-          </a:p>
-          <a:p>
-            <a:r>
-              <a:rPr lang="hu-HU" sz="2400" b="0" i="0" dirty="0">
-                <a:solidFill>
-                  <a:srgbClr val="000000"/>
-                </a:solidFill>
-                <a:effectLst/>
-                <a:latin typeface="Calibri" panose="020F0502020204030204" pitchFamily="34" charset="0"/>
-              </a:rPr>
-              <a:t>-Kiszolgáló kezelő-&gt;helyi szerver-&gt;</a:t>
-            </a:r>
-          </a:p>
-          <a:p>
-            <a:r>
-              <a:rPr lang="hu-HU" sz="2400" dirty="0">
-                <a:solidFill>
-                  <a:srgbClr val="000000"/>
-                </a:solidFill>
-                <a:latin typeface="Calibri" panose="020F0502020204030204" pitchFamily="34" charset="0"/>
-              </a:rPr>
-              <a:t>Ethernet-&gt;</a:t>
-            </a:r>
-            <a:r>
-              <a:rPr lang="hu-HU" sz="2400" b="0" i="0" dirty="0">
-                <a:solidFill>
-                  <a:srgbClr val="000000"/>
-                </a:solidFill>
-                <a:effectLst/>
-                <a:latin typeface="Calibri" panose="020F0502020204030204" pitchFamily="34" charset="0"/>
-              </a:rPr>
-              <a:t>jobb klikk-&gt;tulajdonságok-&gt;TCP/IPv4</a:t>
-            </a:r>
-          </a:p>
-          <a:p>
-            <a:r>
-              <a:rPr lang="hu-HU" sz="2400" dirty="0">
-                <a:solidFill>
-                  <a:srgbClr val="000000"/>
-                </a:solidFill>
-                <a:latin typeface="Calibri" panose="020F0502020204030204" pitchFamily="34" charset="0"/>
-              </a:rPr>
-              <a:t>-</a:t>
-            </a:r>
-            <a:r>
-              <a:rPr lang="hu-HU" sz="2400" dirty="0" err="1">
-                <a:solidFill>
-                  <a:srgbClr val="000000"/>
-                </a:solidFill>
-                <a:latin typeface="Calibri" panose="020F0502020204030204" pitchFamily="34" charset="0"/>
-              </a:rPr>
-              <a:t>ip</a:t>
-            </a:r>
-            <a:r>
-              <a:rPr lang="hu-HU" sz="2400" dirty="0">
-                <a:solidFill>
-                  <a:srgbClr val="000000"/>
-                </a:solidFill>
-                <a:latin typeface="Calibri" panose="020F0502020204030204" pitchFamily="34" charset="0"/>
-              </a:rPr>
-              <a:t> cím: 10.0.2.10/24</a:t>
-            </a:r>
-          </a:p>
-          <a:p>
-            <a:r>
-              <a:rPr lang="hu-HU" sz="2400" dirty="0">
-                <a:solidFill>
-                  <a:srgbClr val="000000"/>
-                </a:solidFill>
-                <a:latin typeface="Calibri" panose="020F0502020204030204" pitchFamily="34" charset="0"/>
-              </a:rPr>
-              <a:t>-átjáró. 10.0.2.1</a:t>
-            </a:r>
-            <a:endParaRPr lang="hu-HU" sz="2400" b="0" i="0" dirty="0">
-              <a:solidFill>
-                <a:srgbClr val="000000"/>
-              </a:solidFill>
-              <a:effectLst/>
-              <a:latin typeface="Calibri" panose="020F0502020204030204" pitchFamily="34" charset="0"/>
-            </a:endParaRPr>
+              <a:rPr lang="hu-HU" sz="2200" dirty="0"/>
+              <a:t>-3 felhasználót készítettünk(</a:t>
+            </a:r>
+            <a:r>
+              <a:rPr lang="hu-HU" sz="2200" dirty="0" err="1"/>
+              <a:t>persia</a:t>
+            </a:r>
+            <a:r>
+              <a:rPr lang="hu-HU" sz="2200" dirty="0"/>
+              <a:t>, </a:t>
+            </a:r>
+            <a:r>
+              <a:rPr lang="hu-HU" sz="2200" dirty="0" err="1"/>
+              <a:t>bodir</a:t>
+            </a:r>
+            <a:r>
+              <a:rPr lang="hu-HU" sz="2200" dirty="0"/>
+              <a:t>, </a:t>
+            </a:r>
+            <a:r>
+              <a:rPr lang="hu-HU" sz="2200" dirty="0" err="1"/>
+              <a:t>mucsin</a:t>
+            </a:r>
+            <a:r>
+              <a:rPr lang="hu-HU" sz="2200" dirty="0"/>
+              <a:t>)</a:t>
+            </a:r>
+          </a:p>
+          <a:p>
+            <a:r>
+              <a:rPr lang="hu-HU" sz="2200" dirty="0"/>
+              <a:t>-1 csoport (konyha)</a:t>
+            </a:r>
+          </a:p>
+          <a:p>
+            <a:r>
+              <a:rPr lang="hu-HU" sz="2200" dirty="0"/>
+              <a:t>-Csoporthoz hozzáadjuk a felhasználókat.</a:t>
+            </a:r>
+          </a:p>
+          <a:p>
+            <a:endParaRPr lang="hu-HU" sz="2400" dirty="0"/>
           </a:p>
         </p:txBody>
       </p:sp>
     </p:spTree>
     <p:extLst>
       <p:ext uri="{BB962C8B-B14F-4D97-AF65-F5344CB8AC3E}">
-        <p14:creationId xmlns:p14="http://schemas.microsoft.com/office/powerpoint/2010/main" val="2032616641"/>
+        <p14:creationId xmlns:p14="http://schemas.microsoft.com/office/powerpoint/2010/main" val="1023665602"/>
       </p:ext>
     </p:extLst>
   </p:cSld>
@@ -4595,170 +4644,6 @@
           <p:cNvPr id="2" name="Cím 1">
             <a:extLst>
               <a:ext uri="{FF2B5EF4-FFF2-40B4-BE49-F238E27FC236}">
-                <a16:creationId xmlns:a16="http://schemas.microsoft.com/office/drawing/2014/main" id="{A08A5A86-8DF0-445F-BD37-23F5FC8C1641}"/>
-              </a:ext>
-            </a:extLst>
-          </p:cNvPr>
-          <p:cNvSpPr>
-            <a:spLocks noGrp="1"/>
-          </p:cNvSpPr>
-          <p:nvPr>
-            <p:ph type="title"/>
-          </p:nvPr>
-        </p:nvSpPr>
-        <p:spPr/>
-        <p:txBody>
-          <a:bodyPr/>
-          <a:lstStyle/>
-          <a:p>
-            <a:r>
-              <a:rPr lang="hu-HU" dirty="0"/>
-              <a:t>Új felhasználók, csoportok létrehozása</a:t>
-            </a:r>
-          </a:p>
-        </p:txBody>
-      </p:sp>
-      <p:pic>
-        <p:nvPicPr>
-          <p:cNvPr id="4" name="Tartalom helye 3">
-            <a:extLst>
-              <a:ext uri="{FF2B5EF4-FFF2-40B4-BE49-F238E27FC236}">
-                <a16:creationId xmlns:a16="http://schemas.microsoft.com/office/drawing/2014/main" id="{AC5C3AAC-01CB-4043-94CA-9F58BF3A298E}"/>
-              </a:ext>
-            </a:extLst>
-          </p:cNvPr>
-          <p:cNvPicPr>
-            <a:picLocks noGrp="1"/>
-          </p:cNvPicPr>
-          <p:nvPr>
-            <p:ph idx="1"/>
-          </p:nvPr>
-        </p:nvPicPr>
-        <p:blipFill>
-          <a:blip r:embed="rId2"/>
-          <a:stretch>
-            <a:fillRect/>
-          </a:stretch>
-        </p:blipFill>
-        <p:spPr>
-          <a:xfrm>
-            <a:off x="1097280" y="1927861"/>
-            <a:ext cx="5132205" cy="4303078"/>
-          </a:xfrm>
-          <a:prstGeom prst="rect">
-            <a:avLst/>
-          </a:prstGeom>
-        </p:spPr>
-      </p:pic>
-      <p:sp>
-        <p:nvSpPr>
-          <p:cNvPr id="5" name="Szövegdoboz 4">
-            <a:extLst>
-              <a:ext uri="{FF2B5EF4-FFF2-40B4-BE49-F238E27FC236}">
-                <a16:creationId xmlns:a16="http://schemas.microsoft.com/office/drawing/2014/main" id="{CD26FB6F-2CE6-4AD5-8386-583D6C0C0B8B}"/>
-              </a:ext>
-            </a:extLst>
-          </p:cNvPr>
-          <p:cNvSpPr txBox="1"/>
-          <p:nvPr/>
-        </p:nvSpPr>
-        <p:spPr>
-          <a:xfrm>
-            <a:off x="6679096" y="1947739"/>
-            <a:ext cx="4476584" cy="2308324"/>
-          </a:xfrm>
-          <a:prstGeom prst="rect">
-            <a:avLst/>
-          </a:prstGeom>
-          <a:noFill/>
-        </p:spPr>
-        <p:txBody>
-          <a:bodyPr wrap="square" rtlCol="0">
-            <a:spAutoFit/>
-          </a:bodyPr>
-          <a:lstStyle/>
-          <a:p>
-            <a:r>
-              <a:rPr lang="hu-HU" sz="2400" dirty="0"/>
-              <a:t>-3 felhasználót készítettünk(</a:t>
-            </a:r>
-            <a:r>
-              <a:rPr lang="hu-HU" sz="2400" dirty="0" err="1"/>
-              <a:t>persia</a:t>
-            </a:r>
-            <a:r>
-              <a:rPr lang="hu-HU" sz="2400" dirty="0"/>
-              <a:t>, </a:t>
-            </a:r>
-            <a:r>
-              <a:rPr lang="hu-HU" sz="2400" dirty="0" err="1"/>
-              <a:t>bodir</a:t>
-            </a:r>
-            <a:r>
-              <a:rPr lang="hu-HU" sz="2400" dirty="0"/>
-              <a:t>, </a:t>
-            </a:r>
-            <a:r>
-              <a:rPr lang="hu-HU" sz="2400" dirty="0" err="1"/>
-              <a:t>mucsin</a:t>
-            </a:r>
-            <a:r>
-              <a:rPr lang="hu-HU" sz="2400" dirty="0"/>
-              <a:t>)</a:t>
-            </a:r>
-          </a:p>
-          <a:p>
-            <a:r>
-              <a:rPr lang="hu-HU" sz="2400" dirty="0"/>
-              <a:t>-1 csoport (konyha)</a:t>
-            </a:r>
-          </a:p>
-          <a:p>
-            <a:r>
-              <a:rPr lang="hu-HU" sz="2400" dirty="0"/>
-              <a:t>-Csoporthoz hozzáadjuk a felhasználókat.</a:t>
-            </a:r>
-          </a:p>
-          <a:p>
-            <a:endParaRPr lang="hu-HU" sz="2400" dirty="0"/>
-          </a:p>
-        </p:txBody>
-      </p:sp>
-    </p:spTree>
-    <p:extLst>
-      <p:ext uri="{BB962C8B-B14F-4D97-AF65-F5344CB8AC3E}">
-        <p14:creationId xmlns:p14="http://schemas.microsoft.com/office/powerpoint/2010/main" val="1023665602"/>
-      </p:ext>
-    </p:extLst>
-  </p:cSld>
-  <p:clrMapOvr>
-    <a:masterClrMapping/>
-  </p:clrMapOvr>
-</p:sld>
-</file>
-
-<file path=ppt/slides/slide7.xml><?xml version="1.0" encoding="utf-8"?>
-<p:sld xmlns:a="http://schemas.openxmlformats.org/drawingml/2006/main" xmlns:r="http://schemas.openxmlformats.org/officeDocument/2006/relationships" xmlns:p="http://schemas.openxmlformats.org/presentationml/2006/main">
-  <p:cSld>
-    <p:spTree>
-      <p:nvGrpSpPr>
-        <p:cNvPr id="1" name=""/>
-        <p:cNvGrpSpPr/>
-        <p:nvPr/>
-      </p:nvGrpSpPr>
-      <p:grpSpPr>
-        <a:xfrm>
-          <a:off x="0" y="0"/>
-          <a:ext cx="0" cy="0"/>
-          <a:chOff x="0" y="0"/>
-          <a:chExt cx="0" cy="0"/>
-        </a:xfrm>
-      </p:grpSpPr>
-      <p:sp>
-        <p:nvSpPr>
-          <p:cNvPr id="2" name="Cím 1">
-            <a:extLst>
-              <a:ext uri="{FF2B5EF4-FFF2-40B4-BE49-F238E27FC236}">
                 <a16:creationId xmlns:a16="http://schemas.microsoft.com/office/drawing/2014/main" id="{0E0C78DE-2354-4FB7-AB87-5C440636BFA0}"/>
               </a:ext>
             </a:extLst>
@@ -4845,6 +4730,57 @@
           </a:extLst>
         </p:spPr>
       </p:pic>
+      <p:sp>
+        <p:nvSpPr>
+          <p:cNvPr id="3" name="Szövegdoboz 2">
+            <a:extLst>
+              <a:ext uri="{FF2B5EF4-FFF2-40B4-BE49-F238E27FC236}">
+                <a16:creationId xmlns:a16="http://schemas.microsoft.com/office/drawing/2014/main" id="{EB11CD47-5D04-462A-8805-3E69013390FD}"/>
+              </a:ext>
+            </a:extLst>
+          </p:cNvPr>
+          <p:cNvSpPr txBox="1"/>
+          <p:nvPr/>
+        </p:nvSpPr>
+        <p:spPr>
+          <a:xfrm>
+            <a:off x="6809591" y="1965533"/>
+            <a:ext cx="4346089" cy="830997"/>
+          </a:xfrm>
+          <a:prstGeom prst="rect">
+            <a:avLst/>
+          </a:prstGeom>
+          <a:noFill/>
+        </p:spPr>
+        <p:txBody>
+          <a:bodyPr wrap="square" rtlCol="0">
+            <a:spAutoFit/>
+          </a:bodyPr>
+          <a:lstStyle/>
+          <a:p>
+            <a:r>
+              <a:rPr lang="hu-HU" sz="2400" dirty="0"/>
+              <a:t>-</a:t>
+            </a:r>
+            <a:r>
+              <a:rPr lang="hu-HU" sz="2400" dirty="0" err="1"/>
+              <a:t>Active</a:t>
+            </a:r>
+            <a:r>
+              <a:rPr lang="hu-HU" sz="2400" dirty="0"/>
+              <a:t> </a:t>
+            </a:r>
+            <a:r>
+              <a:rPr lang="hu-HU" sz="2400" dirty="0" err="1"/>
+              <a:t>directory</a:t>
+            </a:r>
+            <a:r>
+              <a:rPr lang="hu-HU" sz="2400" dirty="0"/>
+              <a:t> felügyeleti központ telepítése</a:t>
+            </a:r>
+          </a:p>
+        </p:txBody>
+      </p:sp>
     </p:spTree>
     <p:extLst>
       <p:ext uri="{BB962C8B-B14F-4D97-AF65-F5344CB8AC3E}">
